--- a/livro_ia_educacao/saida/pptx/Cap20_slides.pptx
+++ b/livro_ia_educacao/saida/pptx/Cap20_slides.pptx
@@ -10085,11 +10085,11 @@
         <p:spPr>
           <a:xfrm>
             <a:off x="548640" y="1417320"/>
-            <a:ext cx="11064240" cy="762000"/>
+            <a:ext cx="11064240" cy="682752"/>
           </a:xfrm>
           <a:prstGeom prst="roundRect">
             <a:avLst>
-              <a:gd name="adj" fmla="val 14400"/>
+              <a:gd name="adj" fmla="val 16071"/>
             </a:avLst>
           </a:prstGeom>
           <a:solidFill>
@@ -10116,7 +10116,7 @@
         <p:spPr>
           <a:xfrm>
             <a:off x="731520" y="1417320"/>
-            <a:ext cx="548640" cy="762000"/>
+            <a:ext cx="548640" cy="682752"/>
           </a:xfrm>
           <a:prstGeom prst="rect">
             <a:avLst/>
@@ -10152,7 +10152,7 @@
         <p:spPr>
           <a:xfrm>
             <a:off x="1463040" y="1417320"/>
-            <a:ext cx="9966960" cy="762000"/>
+            <a:ext cx="9966960" cy="682752"/>
           </a:xfrm>
           <a:prstGeom prst="rect">
             <a:avLst/>
@@ -10187,12 +10187,12 @@
         </p:nvSpPr>
         <p:spPr>
           <a:xfrm>
-            <a:off x="548640" y="2289048"/>
-            <a:ext cx="11064240" cy="762000"/>
+            <a:off x="548640" y="2209800"/>
+            <a:ext cx="11064240" cy="682752"/>
           </a:xfrm>
           <a:prstGeom prst="roundRect">
             <a:avLst>
-              <a:gd name="adj" fmla="val 14400"/>
+              <a:gd name="adj" fmla="val 16071"/>
             </a:avLst>
           </a:prstGeom>
           <a:solidFill>
@@ -10218,8 +10218,8 @@
         </p:nvSpPr>
         <p:spPr>
           <a:xfrm>
-            <a:off x="731520" y="2289048"/>
-            <a:ext cx="548640" cy="762000"/>
+            <a:off x="731520" y="2209800"/>
+            <a:ext cx="548640" cy="682752"/>
           </a:xfrm>
           <a:prstGeom prst="rect">
             <a:avLst/>
@@ -10254,8 +10254,8 @@
         </p:nvSpPr>
         <p:spPr>
           <a:xfrm>
-            <a:off x="1463040" y="2289048"/>
-            <a:ext cx="9966960" cy="762000"/>
+            <a:off x="1463040" y="2209800"/>
+            <a:ext cx="9966960" cy="682752"/>
           </a:xfrm>
           <a:prstGeom prst="rect">
             <a:avLst/>
@@ -10290,12 +10290,12 @@
         </p:nvSpPr>
         <p:spPr>
           <a:xfrm>
-            <a:off x="548640" y="3160776"/>
-            <a:ext cx="11064240" cy="762000"/>
+            <a:off x="548640" y="3002280"/>
+            <a:ext cx="11064240" cy="682752"/>
           </a:xfrm>
           <a:prstGeom prst="roundRect">
             <a:avLst>
-              <a:gd name="adj" fmla="val 14400"/>
+              <a:gd name="adj" fmla="val 16071"/>
             </a:avLst>
           </a:prstGeom>
           <a:solidFill>
@@ -10321,8 +10321,8 @@
         </p:nvSpPr>
         <p:spPr>
           <a:xfrm>
-            <a:off x="731520" y="3160776"/>
-            <a:ext cx="548640" cy="762000"/>
+            <a:off x="731520" y="3002280"/>
+            <a:ext cx="548640" cy="682752"/>
           </a:xfrm>
           <a:prstGeom prst="rect">
             <a:avLst/>
@@ -10357,8 +10357,8 @@
         </p:nvSpPr>
         <p:spPr>
           <a:xfrm>
-            <a:off x="1463040" y="3160776"/>
-            <a:ext cx="9966960" cy="762000"/>
+            <a:off x="1463040" y="3002280"/>
+            <a:ext cx="9966960" cy="682752"/>
           </a:xfrm>
           <a:prstGeom prst="rect">
             <a:avLst/>
@@ -10393,12 +10393,12 @@
         </p:nvSpPr>
         <p:spPr>
           <a:xfrm>
-            <a:off x="548640" y="4032504"/>
-            <a:ext cx="11064240" cy="762000"/>
+            <a:off x="548640" y="3794760"/>
+            <a:ext cx="11064240" cy="682752"/>
           </a:xfrm>
           <a:prstGeom prst="roundRect">
             <a:avLst>
-              <a:gd name="adj" fmla="val 14400"/>
+              <a:gd name="adj" fmla="val 16071"/>
             </a:avLst>
           </a:prstGeom>
           <a:solidFill>
@@ -10424,8 +10424,8 @@
         </p:nvSpPr>
         <p:spPr>
           <a:xfrm>
-            <a:off x="731520" y="4032504"/>
-            <a:ext cx="548640" cy="762000"/>
+            <a:off x="731520" y="3794760"/>
+            <a:ext cx="548640" cy="682752"/>
           </a:xfrm>
           <a:prstGeom prst="rect">
             <a:avLst/>
@@ -10460,8 +10460,8 @@
         </p:nvSpPr>
         <p:spPr>
           <a:xfrm>
-            <a:off x="1463040" y="4032504"/>
-            <a:ext cx="9966960" cy="762000"/>
+            <a:off x="1463040" y="3794760"/>
+            <a:ext cx="9966960" cy="682752"/>
           </a:xfrm>
           <a:prstGeom prst="rect">
             <a:avLst/>
@@ -10496,12 +10496,12 @@
         </p:nvSpPr>
         <p:spPr>
           <a:xfrm>
-            <a:off x="548640" y="4904232"/>
-            <a:ext cx="11064240" cy="762000"/>
+            <a:off x="548640" y="4587240"/>
+            <a:ext cx="11064240" cy="682752"/>
           </a:xfrm>
           <a:prstGeom prst="roundRect">
             <a:avLst>
-              <a:gd name="adj" fmla="val 14400"/>
+              <a:gd name="adj" fmla="val 16071"/>
             </a:avLst>
           </a:prstGeom>
           <a:solidFill>
@@ -10527,8 +10527,8 @@
         </p:nvSpPr>
         <p:spPr>
           <a:xfrm>
-            <a:off x="731520" y="4904232"/>
-            <a:ext cx="548640" cy="762000"/>
+            <a:off x="731520" y="4587240"/>
+            <a:ext cx="548640" cy="682752"/>
           </a:xfrm>
           <a:prstGeom prst="rect">
             <a:avLst/>
@@ -10563,8 +10563,8 @@
         </p:nvSpPr>
         <p:spPr>
           <a:xfrm>
-            <a:off x="1463040" y="4904232"/>
-            <a:ext cx="9966960" cy="762000"/>
+            <a:off x="1463040" y="4587240"/>
+            <a:ext cx="9966960" cy="682752"/>
           </a:xfrm>
           <a:prstGeom prst="rect">
             <a:avLst/>
@@ -10599,12 +10599,12 @@
         </p:nvSpPr>
         <p:spPr>
           <a:xfrm>
-            <a:off x="548640" y="5775960"/>
-            <a:ext cx="11064240" cy="762000"/>
+            <a:off x="548640" y="5379720"/>
+            <a:ext cx="11064240" cy="682752"/>
           </a:xfrm>
           <a:prstGeom prst="roundRect">
             <a:avLst>
-              <a:gd name="adj" fmla="val 14400"/>
+              <a:gd name="adj" fmla="val 16071"/>
             </a:avLst>
           </a:prstGeom>
           <a:solidFill>
@@ -10630,8 +10630,8 @@
         </p:nvSpPr>
         <p:spPr>
           <a:xfrm>
-            <a:off x="731520" y="5775960"/>
-            <a:ext cx="548640" cy="762000"/>
+            <a:off x="731520" y="5379720"/>
+            <a:ext cx="548640" cy="682752"/>
           </a:xfrm>
           <a:prstGeom prst="rect">
             <a:avLst/>
@@ -10666,8 +10666,8 @@
         </p:nvSpPr>
         <p:spPr>
           <a:xfrm>
-            <a:off x="1463040" y="5775960"/>
-            <a:ext cx="9966960" cy="762000"/>
+            <a:off x="1463040" y="5379720"/>
+            <a:ext cx="9966960" cy="682752"/>
           </a:xfrm>
           <a:prstGeom prst="rect">
             <a:avLst/>
